--- a/lecons/LSA/Hydrology/LSA_HYDRO_L22_Introduction_to_Hydrology.pptx
+++ b/lecons/LSA/Hydrology/LSA_HYDRO_L22_Introduction_to_Hydrology.pptx
@@ -6584,7 +6584,7 @@
                 <a:ea typeface="Times New Roman" pitchFamily="34" charset="-122"/>
                 <a:cs typeface="Times New Roman" pitchFamily="34" charset="-120"/>
               </a:rPr>
-              <a:t>Lesson 22: Introduction to Hydrology</a:t>
+              <a:t>Lesson 22</a:t>
             </a:r>
             <a:endParaRPr lang="en-US" sz="2600" dirty="0"/>
           </a:p>
